--- a/templates/standard/98_三一頌.pptx
+++ b/templates/standard/98_三一頌.pptx
@@ -1,6 +1,6 @@
 
 <file path=ppt/presentation.xml><?xml version="1.0" encoding="utf-8"?>
-<p:presentation xmlns:a="http://schemas.openxmlformats.org/drawingml/2006/main" xmlns:r="http://schemas.openxmlformats.org/officeDocument/2006/relationships" xmlns:p="http://schemas.openxmlformats.org/presentationml/2006/main" saveSubsetFonts="1">
+<p:presentation xmlns:p15="http://schemas.microsoft.com/office/powerpoint/2012/main" xmlns:a="http://schemas.openxmlformats.org/drawingml/2006/main" xmlns:r="http://schemas.openxmlformats.org/officeDocument/2006/relationships" xmlns:p="http://schemas.openxmlformats.org/presentationml/2006/main" saveSubsetFonts="1">
   <p:sldMasterIdLst>
     <p:sldMasterId id="2147483648" r:id="rId1"/>
   </p:sldMasterIdLst>
@@ -436,7 +436,7 @@
 </file>
 
 <file path=ppt/slideMasters/slideMaster1.xml><?xml version="1.0" encoding="utf-8"?>
-<p:sldMaster xmlns:a="http://schemas.openxmlformats.org/drawingml/2006/main" xmlns:r="http://schemas.openxmlformats.org/officeDocument/2006/relationships" xmlns:p="http://schemas.openxmlformats.org/presentationml/2006/main">
+<p:sldMaster xmlns:a14="http://schemas.microsoft.com/office/drawing/2010/main" xmlns:a="http://schemas.openxmlformats.org/drawingml/2006/main" xmlns:r="http://schemas.openxmlformats.org/officeDocument/2006/relationships" xmlns:p="http://schemas.openxmlformats.org/presentationml/2006/main">
   <p:cSld>
     <p:bg>
       <p:bgPr>
